--- a/presentation.pptx
+++ b/presentation.pptx
@@ -9056,7 +9056,23 @@
                   <a:srgbClr val="262626"/>
                 </a:solidFill>
               </a:rPr>
-              <a:t> (Azure OpenAI).</a:t>
+              <a:t> (Azure) or </a:t>
+            </a:r>
+            <a:r>
+              <a:rPr sz="1500" b="1">
+                <a:solidFill>
+                  <a:srgbClr val="262626"/>
+                </a:solidFill>
+              </a:rPr>
+              <a:t>Claude Haiku 4.5</a:t>
+            </a:r>
+            <a:r>
+              <a:rPr sz="1500" b="0">
+                <a:solidFill>
+                  <a:srgbClr val="262626"/>
+                </a:solidFill>
+              </a:rPr>
+              <a:t> (AWS Bedrock).</a:t>
             </a:r>
           </a:p>
           <a:p>
@@ -9071,7 +9087,7 @@
                   <a:srgbClr val="262626"/>
                 </a:solidFill>
               </a:rPr>
-              <a:t>•  Degrades gracefully without credentials; disabled by default.</a:t>
+              <a:t>•  Provider-agnostic; degrades gracefully without credentials; disabled by default.</a:t>
             </a:r>
           </a:p>
         </p:txBody>
@@ -9269,7 +9285,7 @@
                   <a:srgbClr val="243F60"/>
                 </a:solidFill>
               </a:rPr>
-              <a:t>0% → F1 0.963</a:t>
+              <a:t>0% → F1 1.00</a:t>
             </a:r>
           </a:p>
           <a:p>
@@ -9280,7 +9296,7 @@
                   <a:srgbClr val="555555"/>
                 </a:solidFill>
               </a:rPr>
-              <a:t>naming-based leakage detection, 30-feature labelled benchmark</a:t>
+              <a:t>naming-based leakage detection, live evaluation (30-feature benchmark)</a:t>
             </a:r>
           </a:p>
         </p:txBody>
@@ -9405,7 +9421,7 @@
                   <a:srgbClr val="FFFFFF"/>
                 </a:solidFill>
               </a:rPr>
-              <a:t>Semantic Module: Evaluation and an Honest Caveat</a:t>
+              <a:t>Semantic Module: Live Evaluation Results</a:t>
             </a:r>
           </a:p>
         </p:txBody>
@@ -9594,8 +9610,8 @@
         </p:nvSpPr>
         <p:spPr>
           <a:xfrm>
-            <a:off x="640080" y="1188720"/>
-            <a:ext cx="10881360" cy="822960"/>
+            <a:off x="640080" y="1097280"/>
+            <a:ext cx="10881360" cy="411480"/>
           </a:xfrm>
           <a:prstGeom prst="rect">
             <a:avLst/>
@@ -9608,380 +9624,964 @@
           </a:bodyPr>
           <a:lstStyle/>
           <a:p>
-            <a:pPr algn="l">
-              <a:spcAft>
-                <a:spcPts val="800"/>
-              </a:spcAft>
-            </a:pPr>
-            <a:r>
-              <a:rPr sz="1700" b="0">
+            <a:pPr algn="l"/>
+            <a:r>
+              <a:rPr sz="1600" b="0">
                 <a:solidFill>
                   <a:srgbClr val="262626"/>
                 </a:solidFill>
               </a:rPr>
-              <a:t>•  Manually labelled </a:t>
-            </a:r>
-            <a:r>
-              <a:rPr sz="1700" b="1">
+              <a:t>Manually labelled 30-feature benchmark, evaluated </a:t>
+            </a:r>
+            <a:r>
+              <a:rPr sz="1600" b="1">
                 <a:solidFill>
                   <a:srgbClr val="262626"/>
                 </a:solidFill>
               </a:rPr>
-              <a:t>30-feature benchmark</a:t>
-            </a:r>
-            <a:r>
-              <a:rPr sz="1700" b="0">
+              <a:t>live</a:t>
+            </a:r>
+            <a:r>
+              <a:rPr sz="1600" b="0">
                 <a:solidFill>
                   <a:srgbClr val="262626"/>
                 </a:solidFill>
               </a:rPr>
-              <a:t> across temporal, proxy, post-hoc, and indirect leakage types (data/semantic_benchmark.json).</a:t>
-            </a:r>
-          </a:p>
-        </p:txBody>
-      </p:sp>
-      <p:sp>
-        <p:nvSpPr>
-          <p:cNvPr id="8" name="Rounded Rectangle 7"/>
+              <a:t> against Claude Haiku 4.5 (AWS Bedrock):</a:t>
+            </a:r>
+          </a:p>
+        </p:txBody>
+      </p:sp>
+      <p:graphicFrame>
+        <p:nvGraphicFramePr>
+          <p:cNvPr id="8" name="Table 7"/>
+          <p:cNvGraphicFramePr>
+            <a:graphicFrameLocks noGrp="1"/>
+          </p:cNvGraphicFramePr>
+          <p:nvPr/>
+        </p:nvGraphicFramePr>
+        <p:xfrm>
+          <a:off x="2103120" y="1600200"/>
+          <a:ext cx="8138160" cy="1316736"/>
+        </p:xfrm>
+        <a:graphic>
+          <a:graphicData uri="http://schemas.openxmlformats.org/drawingml/2006/table">
+            <a:tbl>
+              <a:tblPr>
+                <a:tableStyleId>{5C22544A-7EE6-4342-B048-85BDC9FD1C3A}</a:tableStyleId>
+              </a:tblPr>
+              <a:tblGrid>
+                <a:gridCol w="2651760"/>
+                <a:gridCol w="1051560"/>
+                <a:gridCol w="1051560"/>
+                <a:gridCol w="1051560"/>
+                <a:gridCol w="777240"/>
+                <a:gridCol w="777240"/>
+                <a:gridCol w="777240"/>
+              </a:tblGrid>
+              <a:tr h="438912">
+                <a:tc>
+                  <a:txBody>
+                    <a:bodyPr/>
+                    <a:lstStyle/>
+                    <a:p>
+                      <a:pPr algn="l"/>
+                      <a:r>
+                        <a:rPr sz="1500" b="1">
+                          <a:solidFill>
+                            <a:srgbClr val="FFFFFF"/>
+                          </a:solidFill>
+                        </a:rPr>
+                        <a:t>Threshold</a:t>
+                      </a:r>
+                    </a:p>
+                  </a:txBody>
+                  <a:tcPr anchor="ctr" marL="73152" marR="73152">
+                    <a:solidFill>
+                      <a:srgbClr val="243F60"/>
+                    </a:solidFill>
+                  </a:tcPr>
+                </a:tc>
+                <a:tc>
+                  <a:txBody>
+                    <a:bodyPr/>
+                    <a:lstStyle/>
+                    <a:p>
+                      <a:pPr algn="ctr"/>
+                      <a:r>
+                        <a:rPr sz="1500" b="1">
+                          <a:solidFill>
+                            <a:srgbClr val="FFFFFF"/>
+                          </a:solidFill>
+                        </a:rPr>
+                        <a:t>P</a:t>
+                      </a:r>
+                    </a:p>
+                  </a:txBody>
+                  <a:tcPr anchor="ctr" marL="73152" marR="73152">
+                    <a:solidFill>
+                      <a:srgbClr val="243F60"/>
+                    </a:solidFill>
+                  </a:tcPr>
+                </a:tc>
+                <a:tc>
+                  <a:txBody>
+                    <a:bodyPr/>
+                    <a:lstStyle/>
+                    <a:p>
+                      <a:pPr algn="ctr"/>
+                      <a:r>
+                        <a:rPr sz="1500" b="1">
+                          <a:solidFill>
+                            <a:srgbClr val="FFFFFF"/>
+                          </a:solidFill>
+                        </a:rPr>
+                        <a:t>R</a:t>
+                      </a:r>
+                    </a:p>
+                  </a:txBody>
+                  <a:tcPr anchor="ctr" marL="73152" marR="73152">
+                    <a:solidFill>
+                      <a:srgbClr val="243F60"/>
+                    </a:solidFill>
+                  </a:tcPr>
+                </a:tc>
+                <a:tc>
+                  <a:txBody>
+                    <a:bodyPr/>
+                    <a:lstStyle/>
+                    <a:p>
+                      <a:pPr algn="ctr"/>
+                      <a:r>
+                        <a:rPr sz="1500" b="1">
+                          <a:solidFill>
+                            <a:srgbClr val="FFFFFF"/>
+                          </a:solidFill>
+                        </a:rPr>
+                        <a:t>F1</a:t>
+                      </a:r>
+                    </a:p>
+                  </a:txBody>
+                  <a:tcPr anchor="ctr" marL="73152" marR="73152">
+                    <a:solidFill>
+                      <a:srgbClr val="243F60"/>
+                    </a:solidFill>
+                  </a:tcPr>
+                </a:tc>
+                <a:tc>
+                  <a:txBody>
+                    <a:bodyPr/>
+                    <a:lstStyle/>
+                    <a:p>
+                      <a:pPr algn="ctr"/>
+                      <a:r>
+                        <a:rPr sz="1500" b="1">
+                          <a:solidFill>
+                            <a:srgbClr val="FFFFFF"/>
+                          </a:solidFill>
+                        </a:rPr>
+                        <a:t>TP</a:t>
+                      </a:r>
+                    </a:p>
+                  </a:txBody>
+                  <a:tcPr anchor="ctr" marL="73152" marR="73152">
+                    <a:solidFill>
+                      <a:srgbClr val="243F60"/>
+                    </a:solidFill>
+                  </a:tcPr>
+                </a:tc>
+                <a:tc>
+                  <a:txBody>
+                    <a:bodyPr/>
+                    <a:lstStyle/>
+                    <a:p>
+                      <a:pPr algn="ctr"/>
+                      <a:r>
+                        <a:rPr sz="1500" b="1">
+                          <a:solidFill>
+                            <a:srgbClr val="FFFFFF"/>
+                          </a:solidFill>
+                        </a:rPr>
+                        <a:t>FP</a:t>
+                      </a:r>
+                    </a:p>
+                  </a:txBody>
+                  <a:tcPr anchor="ctr" marL="73152" marR="73152">
+                    <a:solidFill>
+                      <a:srgbClr val="243F60"/>
+                    </a:solidFill>
+                  </a:tcPr>
+                </a:tc>
+                <a:tc>
+                  <a:txBody>
+                    <a:bodyPr/>
+                    <a:lstStyle/>
+                    <a:p>
+                      <a:pPr algn="ctr"/>
+                      <a:r>
+                        <a:rPr sz="1500" b="1">
+                          <a:solidFill>
+                            <a:srgbClr val="FFFFFF"/>
+                          </a:solidFill>
+                        </a:rPr>
+                        <a:t>FN</a:t>
+                      </a:r>
+                    </a:p>
+                  </a:txBody>
+                  <a:tcPr anchor="ctr" marL="73152" marR="73152">
+                    <a:solidFill>
+                      <a:srgbClr val="243F60"/>
+                    </a:solidFill>
+                  </a:tcPr>
+                </a:tc>
+              </a:tr>
+              <a:tr h="438912">
+                <a:tc>
+                  <a:txBody>
+                    <a:bodyPr/>
+                    <a:lstStyle/>
+                    <a:p>
+                      <a:pPr algn="l"/>
+                      <a:r>
+                        <a:rPr sz="1500" b="1">
+                          <a:solidFill>
+                            <a:srgbClr val="262626"/>
+                          </a:solidFill>
+                        </a:rPr>
+                        <a:t>medium (default)</a:t>
+                      </a:r>
+                    </a:p>
+                  </a:txBody>
+                  <a:tcPr anchor="ctr" marL="73152" marR="73152">
+                    <a:solidFill>
+                      <a:srgbClr val="FFFFFF"/>
+                    </a:solidFill>
+                  </a:tcPr>
+                </a:tc>
+                <a:tc>
+                  <a:txBody>
+                    <a:bodyPr/>
+                    <a:lstStyle/>
+                    <a:p>
+                      <a:pPr algn="ctr"/>
+                      <a:r>
+                        <a:rPr sz="1500" b="1">
+                          <a:solidFill>
+                            <a:srgbClr val="262626"/>
+                          </a:solidFill>
+                        </a:rPr>
+                        <a:t>1.000</a:t>
+                      </a:r>
+                    </a:p>
+                  </a:txBody>
+                  <a:tcPr anchor="ctr" marL="73152" marR="73152">
+                    <a:solidFill>
+                      <a:srgbClr val="FFFFFF"/>
+                    </a:solidFill>
+                  </a:tcPr>
+                </a:tc>
+                <a:tc>
+                  <a:txBody>
+                    <a:bodyPr/>
+                    <a:lstStyle/>
+                    <a:p>
+                      <a:pPr algn="ctr"/>
+                      <a:r>
+                        <a:rPr sz="1500" b="1">
+                          <a:solidFill>
+                            <a:srgbClr val="262626"/>
+                          </a:solidFill>
+                        </a:rPr>
+                        <a:t>1.000</a:t>
+                      </a:r>
+                    </a:p>
+                  </a:txBody>
+                  <a:tcPr anchor="ctr" marL="73152" marR="73152">
+                    <a:solidFill>
+                      <a:srgbClr val="FFFFFF"/>
+                    </a:solidFill>
+                  </a:tcPr>
+                </a:tc>
+                <a:tc>
+                  <a:txBody>
+                    <a:bodyPr/>
+                    <a:lstStyle/>
+                    <a:p>
+                      <a:pPr algn="ctr"/>
+                      <a:r>
+                        <a:rPr sz="1500" b="1">
+                          <a:solidFill>
+                            <a:srgbClr val="262626"/>
+                          </a:solidFill>
+                        </a:rPr>
+                        <a:t>1.000</a:t>
+                      </a:r>
+                    </a:p>
+                  </a:txBody>
+                  <a:tcPr anchor="ctr" marL="73152" marR="73152">
+                    <a:solidFill>
+                      <a:srgbClr val="FFFFFF"/>
+                    </a:solidFill>
+                  </a:tcPr>
+                </a:tc>
+                <a:tc>
+                  <a:txBody>
+                    <a:bodyPr/>
+                    <a:lstStyle/>
+                    <a:p>
+                      <a:pPr algn="ctr"/>
+                      <a:r>
+                        <a:rPr sz="1500" b="0">
+                          <a:solidFill>
+                            <a:srgbClr val="262626"/>
+                          </a:solidFill>
+                        </a:rPr>
+                        <a:t>14</a:t>
+                      </a:r>
+                    </a:p>
+                  </a:txBody>
+                  <a:tcPr anchor="ctr" marL="73152" marR="73152">
+                    <a:solidFill>
+                      <a:srgbClr val="FFFFFF"/>
+                    </a:solidFill>
+                  </a:tcPr>
+                </a:tc>
+                <a:tc>
+                  <a:txBody>
+                    <a:bodyPr/>
+                    <a:lstStyle/>
+                    <a:p>
+                      <a:pPr algn="ctr"/>
+                      <a:r>
+                        <a:rPr sz="1500" b="0">
+                          <a:solidFill>
+                            <a:srgbClr val="262626"/>
+                          </a:solidFill>
+                        </a:rPr>
+                        <a:t>0</a:t>
+                      </a:r>
+                    </a:p>
+                  </a:txBody>
+                  <a:tcPr anchor="ctr" marL="73152" marR="73152">
+                    <a:solidFill>
+                      <a:srgbClr val="FFFFFF"/>
+                    </a:solidFill>
+                  </a:tcPr>
+                </a:tc>
+                <a:tc>
+                  <a:txBody>
+                    <a:bodyPr/>
+                    <a:lstStyle/>
+                    <a:p>
+                      <a:pPr algn="ctr"/>
+                      <a:r>
+                        <a:rPr sz="1500" b="0">
+                          <a:solidFill>
+                            <a:srgbClr val="262626"/>
+                          </a:solidFill>
+                        </a:rPr>
+                        <a:t>0</a:t>
+                      </a:r>
+                    </a:p>
+                  </a:txBody>
+                  <a:tcPr anchor="ctr" marL="73152" marR="73152">
+                    <a:solidFill>
+                      <a:srgbClr val="FFFFFF"/>
+                    </a:solidFill>
+                  </a:tcPr>
+                </a:tc>
+              </a:tr>
+              <a:tr h="438912">
+                <a:tc>
+                  <a:txBody>
+                    <a:bodyPr/>
+                    <a:lstStyle/>
+                    <a:p>
+                      <a:pPr algn="l"/>
+                      <a:r>
+                        <a:rPr sz="1500" b="0">
+                          <a:solidFill>
+                            <a:srgbClr val="262626"/>
+                          </a:solidFill>
+                        </a:rPr>
+                        <a:t>high</a:t>
+                      </a:r>
+                    </a:p>
+                  </a:txBody>
+                  <a:tcPr anchor="ctr" marL="73152" marR="73152">
+                    <a:solidFill>
+                      <a:srgbClr val="EDF1F7"/>
+                    </a:solidFill>
+                  </a:tcPr>
+                </a:tc>
+                <a:tc>
+                  <a:txBody>
+                    <a:bodyPr/>
+                    <a:lstStyle/>
+                    <a:p>
+                      <a:pPr algn="ctr"/>
+                      <a:r>
+                        <a:rPr sz="1500" b="0">
+                          <a:solidFill>
+                            <a:srgbClr val="262626"/>
+                          </a:solidFill>
+                        </a:rPr>
+                        <a:t>0.917</a:t>
+                      </a:r>
+                    </a:p>
+                  </a:txBody>
+                  <a:tcPr anchor="ctr" marL="73152" marR="73152">
+                    <a:solidFill>
+                      <a:srgbClr val="EDF1F7"/>
+                    </a:solidFill>
+                  </a:tcPr>
+                </a:tc>
+                <a:tc>
+                  <a:txBody>
+                    <a:bodyPr/>
+                    <a:lstStyle/>
+                    <a:p>
+                      <a:pPr algn="ctr"/>
+                      <a:r>
+                        <a:rPr sz="1500" b="0">
+                          <a:solidFill>
+                            <a:srgbClr val="262626"/>
+                          </a:solidFill>
+                        </a:rPr>
+                        <a:t>0.846</a:t>
+                      </a:r>
+                    </a:p>
+                  </a:txBody>
+                  <a:tcPr anchor="ctr" marL="73152" marR="73152">
+                    <a:solidFill>
+                      <a:srgbClr val="EDF1F7"/>
+                    </a:solidFill>
+                  </a:tcPr>
+                </a:tc>
+                <a:tc>
+                  <a:txBody>
+                    <a:bodyPr/>
+                    <a:lstStyle/>
+                    <a:p>
+                      <a:pPr algn="ctr"/>
+                      <a:r>
+                        <a:rPr sz="1500" b="0">
+                          <a:solidFill>
+                            <a:srgbClr val="262626"/>
+                          </a:solidFill>
+                        </a:rPr>
+                        <a:t>0.880</a:t>
+                      </a:r>
+                    </a:p>
+                  </a:txBody>
+                  <a:tcPr anchor="ctr" marL="73152" marR="73152">
+                    <a:solidFill>
+                      <a:srgbClr val="EDF1F7"/>
+                    </a:solidFill>
+                  </a:tcPr>
+                </a:tc>
+                <a:tc>
+                  <a:txBody>
+                    <a:bodyPr/>
+                    <a:lstStyle/>
+                    <a:p>
+                      <a:pPr algn="ctr"/>
+                      <a:r>
+                        <a:rPr sz="1500" b="0">
+                          <a:solidFill>
+                            <a:srgbClr val="262626"/>
+                          </a:solidFill>
+                        </a:rPr>
+                        <a:t>11</a:t>
+                      </a:r>
+                    </a:p>
+                  </a:txBody>
+                  <a:tcPr anchor="ctr" marL="73152" marR="73152">
+                    <a:solidFill>
+                      <a:srgbClr val="EDF1F7"/>
+                    </a:solidFill>
+                  </a:tcPr>
+                </a:tc>
+                <a:tc>
+                  <a:txBody>
+                    <a:bodyPr/>
+                    <a:lstStyle/>
+                    <a:p>
+                      <a:pPr algn="ctr"/>
+                      <a:r>
+                        <a:rPr sz="1500" b="0">
+                          <a:solidFill>
+                            <a:srgbClr val="262626"/>
+                          </a:solidFill>
+                        </a:rPr>
+                        <a:t>1</a:t>
+                      </a:r>
+                    </a:p>
+                  </a:txBody>
+                  <a:tcPr anchor="ctr" marL="73152" marR="73152">
+                    <a:solidFill>
+                      <a:srgbClr val="EDF1F7"/>
+                    </a:solidFill>
+                  </a:tcPr>
+                </a:tc>
+                <a:tc>
+                  <a:txBody>
+                    <a:bodyPr/>
+                    <a:lstStyle/>
+                    <a:p>
+                      <a:pPr algn="ctr"/>
+                      <a:r>
+                        <a:rPr sz="1500" b="0">
+                          <a:solidFill>
+                            <a:srgbClr val="262626"/>
+                          </a:solidFill>
+                        </a:rPr>
+                        <a:t>2</a:t>
+                      </a:r>
+                    </a:p>
+                  </a:txBody>
+                  <a:tcPr anchor="ctr" marL="73152" marR="73152">
+                    <a:solidFill>
+                      <a:srgbClr val="EDF1F7"/>
+                    </a:solidFill>
+                  </a:tcPr>
+                </a:tc>
+              </a:tr>
+            </a:tbl>
+          </a:graphicData>
+        </a:graphic>
+      </p:graphicFrame>
+      <p:sp>
+        <p:nvSpPr>
+          <p:cNvPr id="9" name="TextBox 8"/>
+          <p:cNvSpPr txBox="1"/>
+          <p:nvPr/>
+        </p:nvSpPr>
+        <p:spPr>
+          <a:xfrm>
+            <a:off x="640080" y="3063240"/>
+            <a:ext cx="10881360" cy="365760"/>
+          </a:xfrm>
+          <a:prstGeom prst="rect">
+            <a:avLst/>
+          </a:prstGeom>
+          <a:noFill/>
+        </p:spPr>
+        <p:txBody>
+          <a:bodyPr wrap="square">
+            <a:spAutoFit/>
+          </a:bodyPr>
+          <a:lstStyle/>
+          <a:p>
+            <a:pPr algn="l"/>
+            <a:r>
+              <a:rPr sz="1400" b="0">
+                <a:solidFill>
+                  <a:srgbClr val="555555"/>
+                </a:solidFill>
+              </a:rPr>
+              <a:t>At the high threshold, three disagreements are genuine model behaviour, not mock artefacts:</a:t>
+            </a:r>
+          </a:p>
+        </p:txBody>
+      </p:sp>
+      <p:graphicFrame>
+        <p:nvGraphicFramePr>
+          <p:cNvPr id="10" name="Table 9"/>
+          <p:cNvGraphicFramePr>
+            <a:graphicFrameLocks noGrp="1"/>
+          </p:cNvGraphicFramePr>
+          <p:nvPr/>
+        </p:nvGraphicFramePr>
+        <p:xfrm>
+          <a:off x="822960" y="3520440"/>
+          <a:ext cx="10515600" cy="1536192"/>
+        </p:xfrm>
+        <a:graphic>
+          <a:graphicData uri="http://schemas.openxmlformats.org/drawingml/2006/table">
+            <a:tbl>
+              <a:tblPr>
+                <a:tableStyleId>{5C22544A-7EE6-4342-B048-85BDC9FD1C3A}</a:tableStyleId>
+              </a:tblPr>
+              <a:tblGrid>
+                <a:gridCol w="3291840"/>
+                <a:gridCol w="1554480"/>
+                <a:gridCol w="1554480"/>
+                <a:gridCol w="4114800"/>
+              </a:tblGrid>
+              <a:tr h="384048">
+                <a:tc>
+                  <a:txBody>
+                    <a:bodyPr/>
+                    <a:lstStyle/>
+                    <a:p>
+                      <a:pPr algn="l"/>
+                      <a:r>
+                        <a:rPr sz="1300" b="1">
+                          <a:solidFill>
+                            <a:srgbClr val="FFFFFF"/>
+                          </a:solidFill>
+                        </a:rPr>
+                        <a:t>Feature</a:t>
+                      </a:r>
+                    </a:p>
+                  </a:txBody>
+                  <a:tcPr anchor="ctr" marL="73152" marR="73152">
+                    <a:solidFill>
+                      <a:srgbClr val="243F60"/>
+                    </a:solidFill>
+                  </a:tcPr>
+                </a:tc>
+                <a:tc>
+                  <a:txBody>
+                    <a:bodyPr/>
+                    <a:lstStyle/>
+                    <a:p>
+                      <a:pPr algn="ctr"/>
+                      <a:r>
+                        <a:rPr sz="1300" b="1">
+                          <a:solidFill>
+                            <a:srgbClr val="FFFFFF"/>
+                          </a:solidFill>
+                        </a:rPr>
+                        <a:t>Ground truth</a:t>
+                      </a:r>
+                    </a:p>
+                  </a:txBody>
+                  <a:tcPr anchor="ctr" marL="73152" marR="73152">
+                    <a:solidFill>
+                      <a:srgbClr val="243F60"/>
+                    </a:solidFill>
+                  </a:tcPr>
+                </a:tc>
+                <a:tc>
+                  <a:txBody>
+                    <a:bodyPr/>
+                    <a:lstStyle/>
+                    <a:p>
+                      <a:pPr algn="ctr"/>
+                      <a:r>
+                        <a:rPr sz="1300" b="1">
+                          <a:solidFill>
+                            <a:srgbClr val="FFFFFF"/>
+                          </a:solidFill>
+                        </a:rPr>
+                        <a:t>Predicted</a:t>
+                      </a:r>
+                    </a:p>
+                  </a:txBody>
+                  <a:tcPr anchor="ctr" marL="73152" marR="73152">
+                    <a:solidFill>
+                      <a:srgbClr val="243F60"/>
+                    </a:solidFill>
+                  </a:tcPr>
+                </a:tc>
+                <a:tc>
+                  <a:txBody>
+                    <a:bodyPr/>
+                    <a:lstStyle/>
+                    <a:p>
+                      <a:pPr algn="l"/>
+                      <a:r>
+                        <a:rPr sz="1300" b="1">
+                          <a:solidFill>
+                            <a:srgbClr val="FFFFFF"/>
+                          </a:solidFill>
+                        </a:rPr>
+                        <a:t>Note</a:t>
+                      </a:r>
+                    </a:p>
+                  </a:txBody>
+                  <a:tcPr anchor="ctr" marL="73152" marR="73152">
+                    <a:solidFill>
+                      <a:srgbClr val="243F60"/>
+                    </a:solidFill>
+                  </a:tcPr>
+                </a:tc>
+              </a:tr>
+              <a:tr h="384048">
+                <a:tc>
+                  <a:txBody>
+                    <a:bodyPr/>
+                    <a:lstStyle/>
+                    <a:p>
+                      <a:pPr algn="l"/>
+                      <a:r>
+                        <a:rPr sz="1300" b="0">
+                          <a:solidFill>
+                            <a:srgbClr val="262626"/>
+                          </a:solidFill>
+                        </a:rPr>
+                        <a:t>treatment_count</a:t>
+                      </a:r>
+                    </a:p>
+                  </a:txBody>
+                  <a:tcPr anchor="ctr" marL="73152" marR="73152">
+                    <a:solidFill>
+                      <a:srgbClr val="FFFFFF"/>
+                    </a:solidFill>
+                  </a:tcPr>
+                </a:tc>
+                <a:tc>
+                  <a:txBody>
+                    <a:bodyPr/>
+                    <a:lstStyle/>
+                    <a:p>
+                      <a:pPr algn="ctr"/>
+                      <a:r>
+                        <a:rPr sz="1300" b="0">
+                          <a:solidFill>
+                            <a:srgbClr val="262626"/>
+                          </a:solidFill>
+                        </a:rPr>
+                        <a:t>medium</a:t>
+                      </a:r>
+                    </a:p>
+                  </a:txBody>
+                  <a:tcPr anchor="ctr" marL="73152" marR="73152">
+                    <a:solidFill>
+                      <a:srgbClr val="FFFFFF"/>
+                    </a:solidFill>
+                  </a:tcPr>
+                </a:tc>
+                <a:tc>
+                  <a:txBody>
+                    <a:bodyPr/>
+                    <a:lstStyle/>
+                    <a:p>
+                      <a:pPr algn="ctr"/>
+                      <a:r>
+                        <a:rPr sz="1300" b="0">
+                          <a:solidFill>
+                            <a:srgbClr val="262626"/>
+                          </a:solidFill>
+                        </a:rPr>
+                        <a:t>high</a:t>
+                      </a:r>
+                    </a:p>
+                  </a:txBody>
+                  <a:tcPr anchor="ctr" marL="73152" marR="73152">
+                    <a:solidFill>
+                      <a:srgbClr val="FFFFFF"/>
+                    </a:solidFill>
+                  </a:tcPr>
+                </a:tc>
+                <a:tc>
+                  <a:txBody>
+                    <a:bodyPr/>
+                    <a:lstStyle/>
+                    <a:p>
+                      <a:pPr algn="l"/>
+                      <a:r>
+                        <a:rPr sz="1300" b="0">
+                          <a:solidFill>
+                            <a:srgbClr val="262626"/>
+                          </a:solidFill>
+                        </a:rPr>
+                        <a:t>Documented as genuinely ambiguous</a:t>
+                      </a:r>
+                    </a:p>
+                  </a:txBody>
+                  <a:tcPr anchor="ctr" marL="73152" marR="73152">
+                    <a:solidFill>
+                      <a:srgbClr val="FFFFFF"/>
+                    </a:solidFill>
+                  </a:tcPr>
+                </a:tc>
+              </a:tr>
+              <a:tr h="384048">
+                <a:tc>
+                  <a:txBody>
+                    <a:bodyPr/>
+                    <a:lstStyle/>
+                    <a:p>
+                      <a:pPr algn="l"/>
+                      <a:r>
+                        <a:rPr sz="1300" b="0">
+                          <a:solidFill>
+                            <a:srgbClr val="262626"/>
+                          </a:solidFill>
+                        </a:rPr>
+                        <a:t>batch_rejection_rate</a:t>
+                      </a:r>
+                    </a:p>
+                  </a:txBody>
+                  <a:tcPr anchor="ctr" marL="73152" marR="73152">
+                    <a:solidFill>
+                      <a:srgbClr val="EDF1F7"/>
+                    </a:solidFill>
+                  </a:tcPr>
+                </a:tc>
+                <a:tc>
+                  <a:txBody>
+                    <a:bodyPr/>
+                    <a:lstStyle/>
+                    <a:p>
+                      <a:pPr algn="ctr"/>
+                      <a:r>
+                        <a:rPr sz="1300" b="0">
+                          <a:solidFill>
+                            <a:srgbClr val="262626"/>
+                          </a:solidFill>
+                        </a:rPr>
+                        <a:t>high</a:t>
+                      </a:r>
+                    </a:p>
+                  </a:txBody>
+                  <a:tcPr anchor="ctr" marL="73152" marR="73152">
+                    <a:solidFill>
+                      <a:srgbClr val="EDF1F7"/>
+                    </a:solidFill>
+                  </a:tcPr>
+                </a:tc>
+                <a:tc>
+                  <a:txBody>
+                    <a:bodyPr/>
+                    <a:lstStyle/>
+                    <a:p>
+                      <a:pPr algn="ctr"/>
+                      <a:r>
+                        <a:rPr sz="1300" b="0">
+                          <a:solidFill>
+                            <a:srgbClr val="262626"/>
+                          </a:solidFill>
+                        </a:rPr>
+                        <a:t>medium</a:t>
+                      </a:r>
+                    </a:p>
+                  </a:txBody>
+                  <a:tcPr anchor="ctr" marL="73152" marR="73152">
+                    <a:solidFill>
+                      <a:srgbClr val="EDF1F7"/>
+                    </a:solidFill>
+                  </a:tcPr>
+                </a:tc>
+                <a:tc>
+                  <a:txBody>
+                    <a:bodyPr/>
+                    <a:lstStyle/>
+                    <a:p>
+                      <a:pPr algn="l"/>
+                      <a:r>
+                        <a:rPr sz="1300" b="0">
+                          <a:solidFill>
+                            <a:srgbClr val="262626"/>
+                          </a:solidFill>
+                        </a:rPr>
+                        <a:t>Proxy feature, under-called</a:t>
+                      </a:r>
+                    </a:p>
+                  </a:txBody>
+                  <a:tcPr anchor="ctr" marL="73152" marR="73152">
+                    <a:solidFill>
+                      <a:srgbClr val="EDF1F7"/>
+                    </a:solidFill>
+                  </a:tcPr>
+                </a:tc>
+              </a:tr>
+              <a:tr h="384048">
+                <a:tc>
+                  <a:txBody>
+                    <a:bodyPr/>
+                    <a:lstStyle/>
+                    <a:p>
+                      <a:pPr algn="l"/>
+                      <a:r>
+                        <a:rPr sz="1300" b="0">
+                          <a:solidFill>
+                            <a:srgbClr val="262626"/>
+                          </a:solidFill>
+                        </a:rPr>
+                        <a:t>training_completion_post_hire</a:t>
+                      </a:r>
+                    </a:p>
+                  </a:txBody>
+                  <a:tcPr anchor="ctr" marL="73152" marR="73152">
+                    <a:solidFill>
+                      <a:srgbClr val="FFFFFF"/>
+                    </a:solidFill>
+                  </a:tcPr>
+                </a:tc>
+                <a:tc>
+                  <a:txBody>
+                    <a:bodyPr/>
+                    <a:lstStyle/>
+                    <a:p>
+                      <a:pPr algn="ctr"/>
+                      <a:r>
+                        <a:rPr sz="1300" b="0">
+                          <a:solidFill>
+                            <a:srgbClr val="262626"/>
+                          </a:solidFill>
+                        </a:rPr>
+                        <a:t>high</a:t>
+                      </a:r>
+                    </a:p>
+                  </a:txBody>
+                  <a:tcPr anchor="ctr" marL="73152" marR="73152">
+                    <a:solidFill>
+                      <a:srgbClr val="FFFFFF"/>
+                    </a:solidFill>
+                  </a:tcPr>
+                </a:tc>
+                <a:tc>
+                  <a:txBody>
+                    <a:bodyPr/>
+                    <a:lstStyle/>
+                    <a:p>
+                      <a:pPr algn="ctr"/>
+                      <a:r>
+                        <a:rPr sz="1300" b="0">
+                          <a:solidFill>
+                            <a:srgbClr val="262626"/>
+                          </a:solidFill>
+                        </a:rPr>
+                        <a:t>medium</a:t>
+                      </a:r>
+                    </a:p>
+                  </a:txBody>
+                  <a:tcPr anchor="ctr" marL="73152" marR="73152">
+                    <a:solidFill>
+                      <a:srgbClr val="FFFFFF"/>
+                    </a:solidFill>
+                  </a:tcPr>
+                </a:tc>
+                <a:tc>
+                  <a:txBody>
+                    <a:bodyPr/>
+                    <a:lstStyle/>
+                    <a:p>
+                      <a:pPr algn="l"/>
+                      <a:r>
+                        <a:rPr sz="1300" b="0">
+                          <a:solidFill>
+                            <a:srgbClr val="262626"/>
+                          </a:solidFill>
+                        </a:rPr>
+                        <a:t>Temporal feature, under-called</a:t>
+                      </a:r>
+                    </a:p>
+                  </a:txBody>
+                  <a:tcPr anchor="ctr" marL="73152" marR="73152">
+                    <a:solidFill>
+                      <a:srgbClr val="FFFFFF"/>
+                    </a:solidFill>
+                  </a:tcPr>
+                </a:tc>
+              </a:tr>
+            </a:tbl>
+          </a:graphicData>
+        </a:graphic>
+      </p:graphicFrame>
+      <p:sp>
+        <p:nvSpPr>
+          <p:cNvPr id="11" name="Rounded Rectangle 10"/>
           <p:cNvSpPr/>
           <p:nvPr/>
         </p:nvSpPr>
         <p:spPr>
           <a:xfrm>
-            <a:off x="2194560" y="1965960"/>
-            <a:ext cx="2377440" cy="1188720"/>
-          </a:xfrm>
-          <a:prstGeom prst="roundRect">
-            <a:avLst>
-              <a:gd name="adj" fmla="val 12000"/>
-            </a:avLst>
-          </a:prstGeom>
-          <a:solidFill>
-            <a:srgbClr val="FFFFFF"/>
-          </a:solidFill>
-          <a:ln w="12700">
-            <a:solidFill>
-              <a:srgbClr val="D5D9E0"/>
-            </a:solidFill>
-          </a:ln>
-          <a:effectLst/>
-        </p:spPr>
-        <p:style>
-          <a:lnRef idx="1">
-            <a:schemeClr val="accent1"/>
-          </a:lnRef>
-          <a:fillRef idx="3">
-            <a:schemeClr val="accent1"/>
-          </a:fillRef>
-          <a:effectRef idx="2">
-            <a:schemeClr val="accent1"/>
-          </a:effectRef>
-          <a:fontRef idx="minor">
-            <a:schemeClr val="lt1"/>
-          </a:fontRef>
-        </p:style>
-        <p:txBody>
-          <a:bodyPr rtlCol="0" anchor="ctr" wrap="square"/>
-          <a:lstStyle/>
-          <a:p>
-            <a:pPr algn="ctr"/>
-            <a:r>
-              <a:rPr sz="3000" b="1">
-                <a:solidFill>
-                  <a:srgbClr val="243F60"/>
-                </a:solidFill>
-              </a:rPr>
-              <a:t>1.00</a:t>
-            </a:r>
-          </a:p>
-          <a:p>
-            <a:pPr algn="ctr"/>
-            <a:r>
-              <a:rPr sz="1200" b="0">
-                <a:solidFill>
-                  <a:srgbClr val="555555"/>
-                </a:solidFill>
-              </a:rPr>
-              <a:t>Precision</a:t>
-            </a:r>
-          </a:p>
-        </p:txBody>
-      </p:sp>
-      <p:sp>
-        <p:nvSpPr>
-          <p:cNvPr id="9" name="Rectangle 8"/>
-          <p:cNvSpPr/>
-          <p:nvPr/>
-        </p:nvSpPr>
-        <p:spPr>
-          <a:xfrm>
-            <a:off x="2194560" y="1965960"/>
-            <a:ext cx="2377440" cy="64008"/>
-          </a:xfrm>
-          <a:prstGeom prst="rect">
-            <a:avLst/>
-          </a:prstGeom>
-          <a:solidFill>
-            <a:srgbClr val="FF8000"/>
-          </a:solidFill>
-          <a:ln>
-            <a:noFill/>
-          </a:ln>
-          <a:effectLst/>
-        </p:spPr>
-        <p:style>
-          <a:lnRef idx="1">
-            <a:schemeClr val="accent1"/>
-          </a:lnRef>
-          <a:fillRef idx="3">
-            <a:schemeClr val="accent1"/>
-          </a:fillRef>
-          <a:effectRef idx="2">
-            <a:schemeClr val="accent1"/>
-          </a:effectRef>
-          <a:fontRef idx="minor">
-            <a:schemeClr val="lt1"/>
-          </a:fontRef>
-        </p:style>
-        <p:txBody>
-          <a:bodyPr rtlCol="0" anchor="ctr"/>
-          <a:lstStyle/>
-          <a:p>
-            <a:pPr algn="ctr"/>
-          </a:p>
-        </p:txBody>
-      </p:sp>
-      <p:sp>
-        <p:nvSpPr>
-          <p:cNvPr id="10" name="Rounded Rectangle 9"/>
-          <p:cNvSpPr/>
-          <p:nvPr/>
-        </p:nvSpPr>
-        <p:spPr>
-          <a:xfrm>
-            <a:off x="4892040" y="1965960"/>
-            <a:ext cx="2377440" cy="1188720"/>
-          </a:xfrm>
-          <a:prstGeom prst="roundRect">
-            <a:avLst>
-              <a:gd name="adj" fmla="val 12000"/>
-            </a:avLst>
-          </a:prstGeom>
-          <a:solidFill>
-            <a:srgbClr val="FFFFFF"/>
-          </a:solidFill>
-          <a:ln w="12700">
-            <a:solidFill>
-              <a:srgbClr val="D5D9E0"/>
-            </a:solidFill>
-          </a:ln>
-          <a:effectLst/>
-        </p:spPr>
-        <p:style>
-          <a:lnRef idx="1">
-            <a:schemeClr val="accent1"/>
-          </a:lnRef>
-          <a:fillRef idx="3">
-            <a:schemeClr val="accent1"/>
-          </a:fillRef>
-          <a:effectRef idx="2">
-            <a:schemeClr val="accent1"/>
-          </a:effectRef>
-          <a:fontRef idx="minor">
-            <a:schemeClr val="lt1"/>
-          </a:fontRef>
-        </p:style>
-        <p:txBody>
-          <a:bodyPr rtlCol="0" anchor="ctr" wrap="square"/>
-          <a:lstStyle/>
-          <a:p>
-            <a:pPr algn="ctr"/>
-            <a:r>
-              <a:rPr sz="3000" b="1">
-                <a:solidFill>
-                  <a:srgbClr val="243F60"/>
-                </a:solidFill>
-              </a:rPr>
-              <a:t>0.93</a:t>
-            </a:r>
-          </a:p>
-          <a:p>
-            <a:pPr algn="ctr"/>
-            <a:r>
-              <a:rPr sz="1200" b="0">
-                <a:solidFill>
-                  <a:srgbClr val="555555"/>
-                </a:solidFill>
-              </a:rPr>
-              <a:t>Recall</a:t>
-            </a:r>
-          </a:p>
-        </p:txBody>
-      </p:sp>
-      <p:sp>
-        <p:nvSpPr>
-          <p:cNvPr id="11" name="Rectangle 10"/>
-          <p:cNvSpPr/>
-          <p:nvPr/>
-        </p:nvSpPr>
-        <p:spPr>
-          <a:xfrm>
-            <a:off x="4892040" y="1965960"/>
-            <a:ext cx="2377440" cy="64008"/>
-          </a:xfrm>
-          <a:prstGeom prst="rect">
-            <a:avLst/>
-          </a:prstGeom>
-          <a:solidFill>
-            <a:srgbClr val="FF8000"/>
-          </a:solidFill>
-          <a:ln>
-            <a:noFill/>
-          </a:ln>
-          <a:effectLst/>
-        </p:spPr>
-        <p:style>
-          <a:lnRef idx="1">
-            <a:schemeClr val="accent1"/>
-          </a:lnRef>
-          <a:fillRef idx="3">
-            <a:schemeClr val="accent1"/>
-          </a:fillRef>
-          <a:effectRef idx="2">
-            <a:schemeClr val="accent1"/>
-          </a:effectRef>
-          <a:fontRef idx="minor">
-            <a:schemeClr val="lt1"/>
-          </a:fontRef>
-        </p:style>
-        <p:txBody>
-          <a:bodyPr rtlCol="0" anchor="ctr"/>
-          <a:lstStyle/>
-          <a:p>
-            <a:pPr algn="ctr"/>
-          </a:p>
-        </p:txBody>
-      </p:sp>
-      <p:sp>
-        <p:nvSpPr>
-          <p:cNvPr id="12" name="Rounded Rectangle 11"/>
-          <p:cNvSpPr/>
-          <p:nvPr/>
-        </p:nvSpPr>
-        <p:spPr>
-          <a:xfrm>
-            <a:off x="7589520" y="1965960"/>
-            <a:ext cx="2377440" cy="1188720"/>
-          </a:xfrm>
-          <a:prstGeom prst="roundRect">
-            <a:avLst>
-              <a:gd name="adj" fmla="val 12000"/>
-            </a:avLst>
-          </a:prstGeom>
-          <a:solidFill>
-            <a:srgbClr val="FFFFFF"/>
-          </a:solidFill>
-          <a:ln w="12700">
-            <a:solidFill>
-              <a:srgbClr val="D5D9E0"/>
-            </a:solidFill>
-          </a:ln>
-          <a:effectLst/>
-        </p:spPr>
-        <p:style>
-          <a:lnRef idx="1">
-            <a:schemeClr val="accent1"/>
-          </a:lnRef>
-          <a:fillRef idx="3">
-            <a:schemeClr val="accent1"/>
-          </a:fillRef>
-          <a:effectRef idx="2">
-            <a:schemeClr val="accent1"/>
-          </a:effectRef>
-          <a:fontRef idx="minor">
-            <a:schemeClr val="lt1"/>
-          </a:fontRef>
-        </p:style>
-        <p:txBody>
-          <a:bodyPr rtlCol="0" anchor="ctr" wrap="square"/>
-          <a:lstStyle/>
-          <a:p>
-            <a:pPr algn="ctr"/>
-            <a:r>
-              <a:rPr sz="3000" b="1">
-                <a:solidFill>
-                  <a:srgbClr val="243F60"/>
-                </a:solidFill>
-              </a:rPr>
-              <a:t>0.963</a:t>
-            </a:r>
-          </a:p>
-          <a:p>
-            <a:pPr algn="ctr"/>
-            <a:r>
-              <a:rPr sz="1200" b="0">
-                <a:solidFill>
-                  <a:srgbClr val="555555"/>
-                </a:solidFill>
-              </a:rPr>
-              <a:t>F1</a:t>
-            </a:r>
-          </a:p>
-        </p:txBody>
-      </p:sp>
-      <p:sp>
-        <p:nvSpPr>
-          <p:cNvPr id="13" name="Rectangle 12"/>
-          <p:cNvSpPr/>
-          <p:nvPr/>
-        </p:nvSpPr>
-        <p:spPr>
-          <a:xfrm>
-            <a:off x="7589520" y="1965960"/>
-            <a:ext cx="2377440" cy="64008"/>
-          </a:xfrm>
-          <a:prstGeom prst="rect">
-            <a:avLst/>
-          </a:prstGeom>
-          <a:solidFill>
-            <a:srgbClr val="FF8000"/>
-          </a:solidFill>
-          <a:ln>
-            <a:noFill/>
-          </a:ln>
-          <a:effectLst/>
-        </p:spPr>
-        <p:style>
-          <a:lnRef idx="1">
-            <a:schemeClr val="accent1"/>
-          </a:lnRef>
-          <a:fillRef idx="3">
-            <a:schemeClr val="accent1"/>
-          </a:fillRef>
-          <a:effectRef idx="2">
-            <a:schemeClr val="accent1"/>
-          </a:effectRef>
-          <a:fontRef idx="minor">
-            <a:schemeClr val="lt1"/>
-          </a:fontRef>
-        </p:style>
-        <p:txBody>
-          <a:bodyPr rtlCol="0" anchor="ctr"/>
-          <a:lstStyle/>
-          <a:p>
-            <a:pPr algn="ctr"/>
-          </a:p>
-        </p:txBody>
-      </p:sp>
-      <p:sp>
-        <p:nvSpPr>
-          <p:cNvPr id="14" name="Rounded Rectangle 13"/>
-          <p:cNvSpPr/>
-          <p:nvPr/>
-        </p:nvSpPr>
-        <p:spPr>
-          <a:xfrm>
-            <a:off x="640080" y="3520440"/>
+            <a:off x="640080" y="5257800"/>
             <a:ext cx="10881360" cy="365760"/>
           </a:xfrm>
           <a:prstGeom prst="roundRect">
@@ -9990,7 +10590,7 @@
             </a:avLst>
           </a:prstGeom>
           <a:solidFill>
-            <a:srgbClr val="B41E1E"/>
+            <a:srgbClr val="2E8B8B"/>
           </a:solidFill>
           <a:ln>
             <a:noFill/>
@@ -10022,31 +10622,31 @@
                   <a:srgbClr val="FFFFFF"/>
                 </a:solidFill>
               </a:rPr>
-              <a:t>Transparency</a:t>
-            </a:r>
-          </a:p>
-        </p:txBody>
-      </p:sp>
-      <p:sp>
-        <p:nvSpPr>
-          <p:cNvPr id="15" name="Rectangle 14"/>
+              <a:t>Why this matters</a:t>
+            </a:r>
+          </a:p>
+        </p:txBody>
+      </p:sp>
+      <p:sp>
+        <p:nvSpPr>
+          <p:cNvPr id="12" name="Rectangle 11"/>
           <p:cNvSpPr/>
           <p:nvPr/>
         </p:nvSpPr>
         <p:spPr>
           <a:xfrm>
-            <a:off x="640080" y="3886200"/>
-            <a:ext cx="10881360" cy="1325880"/>
+            <a:off x="640080" y="5623560"/>
+            <a:ext cx="10881360" cy="594360"/>
           </a:xfrm>
           <a:prstGeom prst="rect">
             <a:avLst/>
           </a:prstGeom>
           <a:solidFill>
-            <a:srgbClr val="FBEAEA"/>
+            <a:srgbClr val="DDEEEE"/>
           </a:solidFill>
           <a:ln w="6350">
             <a:solidFill>
-              <a:srgbClr val="B41E1E"/>
+              <a:srgbClr val="2E8B8B"/>
             </a:solidFill>
           </a:ln>
           <a:effectLst/>
@@ -10075,78 +10675,28 @@
               </a:spcAft>
             </a:pPr>
             <a:r>
-              <a:rPr sz="1500" b="0">
+              <a:rPr sz="1350" b="0">
                 <a:solidFill>
                   <a:srgbClr val="262626"/>
                 </a:solidFill>
               </a:rPr>
-              <a:t>These figures validate the </a:t>
-            </a:r>
-            <a:r>
-              <a:rPr sz="1500" b="1">
+              <a:t>Unlike the earlier mock (rigged with knowledge of the benchmark's exact names), this is an </a:t>
+            </a:r>
+            <a:r>
+              <a:rPr sz="1350" b="1">
                 <a:solidFill>
                   <a:srgbClr val="262626"/>
                 </a:solidFill>
               </a:rPr>
-              <a:t>evaluation harness</a:t>
-            </a:r>
-            <a:r>
-              <a:rPr sz="1500" b="0">
+              <a:t>independent, third-party model</a:t>
+            </a:r>
+            <a:r>
+              <a:rPr sz="1350" b="0">
                 <a:solidFill>
                   <a:srgbClr val="262626"/>
                 </a:solidFill>
               </a:rPr>
-              <a:t> using a deterministic mock analyzer — not the live GPT-4o-mini model (Azure credentials were unavailable at evaluation time). A live-model evaluation is the </a:t>
-            </a:r>
-            <a:r>
-              <a:rPr sz="1500" b="1">
-                <a:solidFill>
-                  <a:srgbClr val="262626"/>
-                </a:solidFill>
-              </a:rPr>
-              <a:t>top-priority item of future work</a:t>
-            </a:r>
-            <a:r>
-              <a:rPr sz="1500" b="0">
-                <a:solidFill>
-                  <a:srgbClr val="262626"/>
-                </a:solidFill>
-              </a:rPr>
-              <a:t>, and this is stated explicitly in the thesis.</a:t>
-            </a:r>
-          </a:p>
-        </p:txBody>
-      </p:sp>
-      <p:sp>
-        <p:nvSpPr>
-          <p:cNvPr id="16" name="TextBox 15"/>
-          <p:cNvSpPr txBox="1"/>
-          <p:nvPr/>
-        </p:nvSpPr>
-        <p:spPr>
-          <a:xfrm>
-            <a:off x="457200" y="5486400"/>
-            <a:ext cx="11277295" cy="502920"/>
-          </a:xfrm>
-          <a:prstGeom prst="rect">
-            <a:avLst/>
-          </a:prstGeom>
-          <a:noFill/>
-        </p:spPr>
-        <p:txBody>
-          <a:bodyPr wrap="square">
-            <a:spAutoFit/>
-          </a:bodyPr>
-          <a:lstStyle/>
-          <a:p>
-            <a:pPr algn="l"/>
-            <a:r>
-              <a:rPr sz="1200" b="0">
-                <a:solidFill>
-                  <a:srgbClr val="555555"/>
-                </a:solidFill>
-              </a:rPr>
-              <a:t>The architecture, prompt design, structured output parsing, and graceful degradation are fully implemented and tested (33 unit tests for Phase 16 modules).</a:t>
+              <a:t> — its errors are real evidence, not an artefact of the test design. Azure OpenAI credentials were never obtained for this project; AWS credits were available.</a:t>
             </a:r>
           </a:p>
         </p:txBody>
@@ -19126,7 +19676,7 @@
                   <a:srgbClr val="262626"/>
                 </a:solidFill>
               </a:rPr>
-              <a:t>Leakage invisible to statistics becomes detectable; evaluation harness built and validated, live-model run queued.</a:t>
+              <a:t>Leakage invisible to statistics becomes detectable; live evaluation against Claude Haiku 4.5 confirms it works.</a:t>
             </a:r>
           </a:p>
         </p:txBody>
@@ -19553,7 +20103,7 @@
                   <a:srgbClr val="243F60"/>
                 </a:solidFill>
               </a:rPr>
-              <a:t>325/325</a:t>
+              <a:t>331/331</a:t>
             </a:r>
           </a:p>
           <a:p>
@@ -20110,7 +20660,7 @@
                   <a:srgbClr val="243F60"/>
                 </a:solidFill>
               </a:rPr>
-              <a:t>Live LLM evaluation</a:t>
+              <a:t>Larger, multi-provider benchmark</a:t>
             </a:r>
           </a:p>
           <a:p>
@@ -20125,7 +20675,7 @@
                   <a:srgbClr val="262626"/>
                 </a:solidFill>
               </a:rPr>
-              <a:t>of the semantic module against the 30-feature benchmark — top priority; the harness is ready, only credentials are missing.</a:t>
+              <a:t>expand beyond 30 features and systematically compare GPT-4o-mini vs. Claude Haiku 4.5 and other models.</a:t>
             </a:r>
           </a:p>
         </p:txBody>
@@ -25417,7 +25967,7 @@
                   <a:srgbClr val="243F60"/>
                 </a:solidFill>
               </a:rPr>
-              <a:t>325</a:t>
+              <a:t>331</a:t>
             </a:r>
           </a:p>
           <a:p>

--- a/presentation.pptx
+++ b/presentation.pptx
@@ -22441,7 +22441,7 @@
                   <a:srgbClr val="243F60"/>
                 </a:solidFill>
               </a:rPr>
-              <a:t>$12.9M</a:t>
+              <a:t>~40%</a:t>
             </a:r>
           </a:p>
           <a:p>
@@ -22452,7 +22452,7 @@
                   <a:srgbClr val="555555"/>
                 </a:solidFill>
               </a:rPr>
-              <a:t>average annual cost of poor data quality per organization</a:t>
+              <a:t>of a data scientist's time spent cleaning and preparing data</a:t>
             </a:r>
           </a:p>
         </p:txBody>
@@ -22616,7 +22616,7 @@
                   <a:srgbClr val="555555"/>
                 </a:solidFill>
               </a:rPr>
-              <a:t>Sources: McKinsey, State of AI survey (2022–2025)  ·  Statista Market Insights (2025)  ·  Gartner data quality research.</a:t>
+              <a:t>Sources: McKinsey, State of AI survey (2022–2025)  ·  Statista Market Insights (2025)  ·  Anaconda, State of Data Science survey.</a:t>
             </a:r>
           </a:p>
         </p:txBody>
@@ -23154,7 +23154,7 @@
                   <a:srgbClr val="FFFFFF"/>
                 </a:solidFill>
               </a:rPr>
-              <a:t>Core question of this thesis</a:t>
+              <a:t>What this thesis sets out to do</a:t>
             </a:r>
           </a:p>
         </p:txBody>
@@ -23207,28 +23207,20 @@
               </a:spcAft>
             </a:pPr>
             <a:r>
+              <a:rPr sz="1700" b="1">
+                <a:solidFill>
+                  <a:srgbClr val="262626"/>
+                </a:solidFill>
+              </a:rPr>
+              <a:t>Automate, quantify, and make actionable</a:t>
+            </a:r>
+            <a:r>
               <a:rPr sz="1700" b="0">
                 <a:solidFill>
                   <a:srgbClr val="262626"/>
                 </a:solidFill>
               </a:rPr>
-              <a:t>Can dataset quality assessment and leakage detection be </a:t>
-            </a:r>
-            <a:r>
-              <a:rPr sz="1700" b="1">
-                <a:solidFill>
-                  <a:srgbClr val="262626"/>
-                </a:solidFill>
-              </a:rPr>
-              <a:t>automated, quantified, and made actionable</a:t>
-            </a:r>
-            <a:r>
-              <a:rPr sz="1700" b="0">
-                <a:solidFill>
-                  <a:srgbClr val="262626"/>
-                </a:solidFill>
-              </a:rPr>
-              <a:t> in a single tool?</a:t>
+              <a:t> dataset quality assessment and leakage detection — in a single tool.</a:t>
             </a:r>
           </a:p>
         </p:txBody>

--- a/presentation.pptx
+++ b/presentation.pptx
@@ -20103,7 +20103,7 @@
                   <a:srgbClr val="243F60"/>
                 </a:solidFill>
               </a:rPr>
-              <a:t>331/331</a:t>
+              <a:t>343/343</a:t>
             </a:r>
           </a:p>
           <a:p>
@@ -25959,7 +25959,7 @@
                   <a:srgbClr val="243F60"/>
                 </a:solidFill>
               </a:rPr>
-              <a:t>331</a:t>
+              <a:t>343</a:t>
             </a:r>
           </a:p>
           <a:p>

--- a/presentation.pptx
+++ b/presentation.pptx
@@ -6079,7 +6079,7 @@
                   <a:srgbClr val="262626"/>
                 </a:solidFill>
               </a:rPr>
-              <a:t>seven-tab dashboard for non-programmers</a:t>
+              <a:t>eight-tab dashboard for non-programmers</a:t>
             </a:r>
           </a:p>
         </p:txBody>
@@ -18957,7 +18957,7 @@
                   <a:srgbClr val="555555"/>
                 </a:solidFill>
               </a:rPr>
-              <a:t>Seven tabs: overview, quality, leakage, features, sufficiency, impact, readiness summary.</a:t>
+              <a:t>Eight tabs: quality, leakage, features, sufficiency, drift, semantic (LLM), recommendations, download.</a:t>
             </a:r>
           </a:p>
           <a:p>
